--- a/cursos/recursos/desequilibrios-de-material/19-desequilibrios-en-la-practica-ii.pptx
+++ b/cursos/recursos/desequilibrios-de-material/19-desequilibrios-en-la-practica-ii.pptx
@@ -3492,7 +3492,7 @@
                 </a:solidFill>
                 <a:latin typeface="Calibri"/>
               </a:rPr>
-              <a:t>Pista: Pensá en saltar con el caballo hacia una casilla desde la que ataque a una torre negra.</a:t>
+              <a:t>Pista: Piensa en saltar con el caballo hacia una casilla desde la que ataque a una torre negra.</a:t>
             </a:r>
           </a:p>
         </p:txBody>
@@ -4347,7 +4347,7 @@
                 </a:solidFill>
                 <a:latin typeface="Calibri"/>
               </a:rPr>
-              <a:t>Pista: Pensá en avanzar la torre hacia el centro del tablero, ofreciendo la calidad.</a:t>
+              <a:t>Pista: Piensa en avanzar la torre hacia el centro del tablero, ofreciendo la calidad.</a:t>
             </a:r>
           </a:p>
         </p:txBody>
@@ -4670,7 +4670,7 @@
                 </a:solidFill>
                 <a:latin typeface="Calibri"/>
               </a:rPr>
-              <a:t>Pista: Pensá en traer la segunda torre hacia la columna f, apoyando la idea anterior.</a:t>
+              <a:t>Pista: Piensa en traer la segunda torre hacia la columna f, apoyando la idea anterior.</a:t>
             </a:r>
           </a:p>
         </p:txBody>
@@ -4993,7 +4993,7 @@
                 </a:solidFill>
                 <a:latin typeface="Calibri"/>
               </a:rPr>
-              <a:t>Pista: Pensá en capturar con el alfil sobre un peón del flanco de rey blanco.</a:t>
+              <a:t>Pista: Piensa en capturar con el alfil sobre un peón del flanco de rey blanco.</a:t>
             </a:r>
           </a:p>
         </p:txBody>
@@ -6023,7 +6023,7 @@
                 </a:solidFill>
                 <a:latin typeface="Calibri"/>
               </a:rPr>
-              <a:t>Pista: Pensá en colocar la torre en una fila donde corte la diagonal que necesita el alfil rival.</a:t>
+              <a:t>Pista: Piensa en colocar la torre en una fila donde corte la diagonal que necesita el alfil rival.</a:t>
             </a:r>
           </a:p>
         </p:txBody>
@@ -6346,7 +6346,7 @@
                 </a:solidFill>
                 <a:latin typeface="Calibri"/>
               </a:rPr>
-              <a:t>Pista: Pensá en avanzar la torre hacia el centro, sabiendo que el rival no puede capturarla sin perder el control sobre el peón pasado.</a:t>
+              <a:t>Pista: Piensa en avanzar la torre hacia el centro, sabiendo que el rival no puede capturarla sin perder el control sobre el peón pasado.</a:t>
             </a:r>
           </a:p>
         </p:txBody>
@@ -7201,7 +7201,7 @@
                 </a:solidFill>
                 <a:latin typeface="Calibri"/>
               </a:rPr>
-              <a:t>Pista: Pensá en capturar con la torre sobre el caballo que sostiene esa idea.</a:t>
+              <a:t>Pista: Piensa en capturar con la torre sobre el caballo que sostiene esa idea.</a:t>
             </a:r>
           </a:p>
         </p:txBody>
@@ -7524,7 +7524,7 @@
                 </a:solidFill>
                 <a:latin typeface="Calibri"/>
               </a:rPr>
-              <a:t>Pista: Pensá en avanzar el peón de torre del flanco de rey, ganando espacio y evitando ese avance negro.</a:t>
+              <a:t>Pista: Piensa en avanzar el peón de torre del flanco de rey, ganando espacio y evitando ese avance negro.</a:t>
             </a:r>
           </a:p>
         </p:txBody>
@@ -8538,7 +8538,7 @@
                 </a:solidFill>
                 <a:latin typeface="Calibri"/>
               </a:rPr>
-              <a:t>Pista: Pensá en capturar con la torre sobre un peón blanco bien defendido en el flanco de dama.</a:t>
+              <a:t>Pista: Piensa en capturar con la torre sobre un peón blanco bien defendido en el flanco de dama.</a:t>
             </a:r>
           </a:p>
         </p:txBody>
@@ -8861,7 +8861,7 @@
                 </a:solidFill>
                 <a:latin typeface="Calibri"/>
               </a:rPr>
-              <a:t>Pista: Pensá en retirar el alfil a una casilla desde la que vigile indirectamente la captura en b4.</a:t>
+              <a:t>Pista: Piensa en retirar el alfil a una casilla desde la que vigile indirectamente la captura en b4.</a:t>
             </a:r>
           </a:p>
         </p:txBody>
@@ -9716,7 +9716,7 @@
                 </a:solidFill>
                 <a:latin typeface="Calibri"/>
               </a:rPr>
-              <a:t>Pista: Pensá en saltar con el caballo hacia una casilla desde la que amenace un doble ataque sobre f7.</a:t>
+              <a:t>Pista: Piensa en saltar con el caballo hacia una casilla desde la que amenace un doble ataque sobre f7.</a:t>
             </a:r>
           </a:p>
         </p:txBody>
@@ -10039,7 +10039,7 @@
                 </a:solidFill>
                 <a:latin typeface="Calibri"/>
               </a:rPr>
-              <a:t>Pista: Pensá en reubicar el alfil hacia una casilla que además controle la primera fila.</a:t>
+              <a:t>Pista: Piensa en reubicar el alfil hacia una casilla que además controle la primera fila.</a:t>
             </a:r>
           </a:p>
         </p:txBody>
@@ -10362,7 +10362,7 @@
                 </a:solidFill>
                 <a:latin typeface="Calibri"/>
               </a:rPr>
-              <a:t>Pista: Pensá en llevar al rey hacia el flanco de rey, preparando reagrupar las piezas con tranquilidad.</a:t>
+              <a:t>Pista: Piensa en llevar al rey hacia el flanco de rey, preparando reagrupar las piezas con tranquilidad.</a:t>
             </a:r>
           </a:p>
         </p:txBody>
@@ -10758,7 +10758,7 @@
                 </a:solidFill>
                 <a:latin typeface="Calibri"/>
               </a:rPr>
-              <a:t>Elegí cinco de las partidas de esta lección y jugá cada posición inicial contra el motor con un límite de treinta segundos para decidir, antes de mover, qué desequilibrio te parece más favorable y para quién. Al terminar el curso, repasá tus notas de las lecciones 1 a 19 y armá una lista propia de los cinco principios que más te costó aplicar en la práctica.</a:t>
+              <a:t>Elige cinco de las partidas de esta lección y juega cada posición inicial contra el motor con un límite de treinta segundos para decidir, antes de mover, qué desequilibrio te parece más favorable y para quién. Al terminar el curso, repasa tus notas de las lecciones 1 a 19 y arma una lista propia de los cinco principios que más te costó aplicar en la práctica.</a:t>
             </a:r>
           </a:p>
           <a:p>
@@ -10790,7 +10790,7 @@
                 </a:solidFill>
                 <a:latin typeface="Calibri"/>
               </a:rPr>
-              <a:t>En la página del curso podés recorrer cada partida con los comentarios, adivinar las jugadas clave en el tablero y continuar cualquier posición contra el motor (Stockfish). La hoja de ejercicios en PDF reúne los momentos clave de esta lección para resolver sin tablero.</a:t>
+              <a:t>En la página del curso puedes recorrer cada partida con los comentarios, adivinar las jugadas clave en el tablero y continuar cualquier posición contra el motor (Stockfish). La hoja de ejercicios en PDF reúne los momentos clave de esta lección para resolver sin tablero.</a:t>
             </a:r>
           </a:p>
         </p:txBody>
@@ -10829,7 +10829,7 @@
                 </a:solidFill>
                 <a:latin typeface="Calibri"/>
               </a:rPr>
-              <a:t>•  Primero recorré la partida completa leyendo los comentarios.</a:t>
+              <a:t>•  Primero recorre la partida completa leyendo los comentarios.</a:t>
             </a:r>
           </a:p>
           <a:p>
@@ -10845,7 +10845,7 @@
                 </a:solidFill>
                 <a:latin typeface="Calibri"/>
               </a:rPr>
-              <a:t>•  Después hacé el modo "adivinar las jugadas clave" hasta acertar todas.</a:t>
+              <a:t>•  Después haz el modo "adivinar las jugadas clave" hasta acertar todas.</a:t>
             </a:r>
           </a:p>
           <a:p>
@@ -10861,7 +10861,7 @@
                 </a:solidFill>
                 <a:latin typeface="Calibri"/>
               </a:rPr>
-              <a:t>•  Por último respondé el cuestionario y anotá con tus palabras las reglas de la lección.</a:t>
+              <a:t>•  Por último responde el cuestionario y anota con tus palabras las reglas de la lección.</a:t>
             </a:r>
           </a:p>
         </p:txBody>
@@ -11306,7 +11306,7 @@
                 </a:solidFill>
                 <a:latin typeface="Calibri"/>
               </a:rPr>
-              <a:t>•  Reconocé primero el patrón general del desequilibrio antes de empezar a calcular variantes concretas.</a:t>
+              <a:t>•  Reconoce primero el patrón general del desequilibrio antes de empezar a calcular variantes concretas.</a:t>
             </a:r>
           </a:p>
           <a:p>
@@ -11322,7 +11322,7 @@
                 </a:solidFill>
                 <a:latin typeface="Calibri"/>
               </a:rPr>
-              <a:t>•  Entrená la velocidad de reconocimiento: en partidas de torneo el tiempo de reloj es limitado.</a:t>
+              <a:t>•  Entrena la velocidad de reconocimiento: en partidas de torneo el tiempo de reloj es limitado.</a:t>
             </a:r>
           </a:p>
           <a:p>
@@ -11338,7 +11338,7 @@
                 </a:solidFill>
                 <a:latin typeface="Calibri"/>
               </a:rPr>
-              <a:t>•  Confiá en los principios ya estudiados: los mejores jugadores los aplican de manera consciente y repetida.</a:t>
+              <a:t>•  Confía en los principios ya estudiados: los mejores jugadores los aplican de manera consciente y repetida.</a:t>
             </a:r>
           </a:p>
           <a:p>
@@ -11354,7 +11354,7 @@
                 </a:solidFill>
                 <a:latin typeface="Calibri"/>
               </a:rPr>
-              <a:t>•  Si dudás bajo presión de reloj, volvé a la pregunta básica: ¿qué bando queda con el plan más claro?</a:t>
+              <a:t>•  Si dudas bajo presión de reloj, vuelve a la pregunta básica: ¿qué bando queda con el plan más claro?</a:t>
             </a:r>
           </a:p>
           <a:p>
@@ -11370,7 +11370,7 @@
                 </a:solidFill>
                 <a:latin typeface="Calibri"/>
               </a:rPr>
-              <a:t>•  Practicá estos reconocimientos hasta que se vuelvan automáticos, sin necesidad de reconstruir todo el razonamiento cada vez.</a:t>
+              <a:t>•  Practica estos reconocimientos hasta que se vuelvan automáticos, sin necesidad de reconstruir todo el razonamiento cada vez.</a:t>
             </a:r>
           </a:p>
         </p:txBody>
@@ -11972,7 +11972,7 @@
                 </a:solidFill>
                 <a:latin typeface="Calibri"/>
               </a:rPr>
-              <a:t>Pista: Pensá en avanzar el peón b, que de otro modo no tiene futuro, ofreciéndolo como sacrificio.</a:t>
+              <a:t>Pista: Piensa en avanzar el peón b, que de otro modo no tiene futuro, ofreciéndolo como sacrificio.</a:t>
             </a:r>
           </a:p>
         </p:txBody>
